--- a/dist/초1/진로·직업/작은목표/초1_진로·직업_작은목표_01_하루목표_학생용.pptx
+++ b/dist/초1/진로·직업/작은목표/초1_진로·직업_작은목표_01_하루목표_학생용.pptx
@@ -114,34 +114,34 @@
   <p:extLst>
     <p:ext uri="{521415D9-36F7-43E2-AB2F-B90AF26B5E84}">
       <p14:sectionLst xmlns:p14="http://schemas.microsoft.com/office/powerpoint/2010/main">
-        <p14:section name="도입" id="{e7e53229-f5d8-cc34-6d73-fc8618d8cda3}">
+        <p14:section name="도입" id="{51b01e9d-e91e-501c-1217-662cf2846ac0}">
           <p14:sldIdLst>
             <p14:sldId id="256"/>
             <p14:sldId id="257"/>
           </p14:sldIdLst>
         </p14:section>
-        <p14:section name="개념" id="{ad0983d6-03a7-42ff-77a3-4f0c34349cf5}">
+        <p14:section name="개념" id="{59b68b1b-b54a-2ea1-2e54-e8d19c6f030b}">
           <p14:sldIdLst>
             <p14:sldId id="258"/>
           </p14:sldIdLst>
         </p14:section>
-        <p14:section name="연습" id="{2edae023-5a79-07ef-279c-8806f3182867}">
+        <p14:section name="연습" id="{fea9a5e0-e72e-99f6-e491-830f416ca419}">
           <p14:sldIdLst>
             <p14:sldId id="259"/>
             <p14:sldId id="260"/>
           </p14:sldIdLst>
         </p14:section>
-        <p14:section name="확인" id="{baa58ce7-00a7-5110-c0fa-41a079594e7e}">
+        <p14:section name="확인" id="{40227cba-5316-1905-9ab4-249c1416b89b}">
           <p14:sldIdLst>
             <p14:sldId id="261"/>
           </p14:sldIdLst>
         </p14:section>
-        <p14:section name="정리" id="{141efc42-ca55-0e69-e556-7dcf995c966e}">
+        <p14:section name="정리" id="{06ef0802-0323-1caa-c40b-94edd9e92991}">
           <p14:sldIdLst>
             <p14:sldId id="262"/>
           </p14:sldIdLst>
         </p14:section>
-        <p14:section name="보충" id="{d295d803-5b8a-bd0d-a454-4850b1e8fbf9}">
+        <p14:section name="보충" id="{4e053142-8c17-b4e3-49c8-b66807f267ac}">
           <p14:sldIdLst>
             <p14:sldId id="263"/>
           </p14:sldIdLst>

--- a/dist/초1/진로·직업/작은목표/초1_진로·직업_작은목표_01_하루목표_학생용.pptx
+++ b/dist/초1/진로·직업/작은목표/초1_진로·직업_작은목표_01_하루목표_학생용.pptx
@@ -114,34 +114,34 @@
   <p:extLst>
     <p:ext uri="{521415D9-36F7-43E2-AB2F-B90AF26B5E84}">
       <p14:sectionLst xmlns:p14="http://schemas.microsoft.com/office/powerpoint/2010/main">
-        <p14:section name="도입" id="{51b01e9d-e91e-501c-1217-662cf2846ac0}">
+        <p14:section name="도입" id="{806b8e9b-7982-cbc3-a5a6-ff8045136366}">
           <p14:sldIdLst>
             <p14:sldId id="256"/>
             <p14:sldId id="257"/>
           </p14:sldIdLst>
         </p14:section>
-        <p14:section name="개념" id="{59b68b1b-b54a-2ea1-2e54-e8d19c6f030b}">
+        <p14:section name="개념" id="{8c56a71b-b885-0491-d576-97ae6ef67c1f}">
           <p14:sldIdLst>
             <p14:sldId id="258"/>
           </p14:sldIdLst>
         </p14:section>
-        <p14:section name="연습" id="{fea9a5e0-e72e-99f6-e491-830f416ca419}">
+        <p14:section name="연습" id="{2865e7f1-723b-0584-b0f2-9fa2fc91bdff}">
           <p14:sldIdLst>
             <p14:sldId id="259"/>
             <p14:sldId id="260"/>
           </p14:sldIdLst>
         </p14:section>
-        <p14:section name="확인" id="{40227cba-5316-1905-9ab4-249c1416b89b}">
+        <p14:section name="확인" id="{6fff011b-d32e-61b8-4ca7-3ecd1610142b}">
           <p14:sldIdLst>
             <p14:sldId id="261"/>
           </p14:sldIdLst>
         </p14:section>
-        <p14:section name="정리" id="{06ef0802-0323-1caa-c40b-94edd9e92991}">
+        <p14:section name="정리" id="{ed176c5b-1922-5f66-28c2-7238148aec7d}">
           <p14:sldIdLst>
             <p14:sldId id="262"/>
           </p14:sldIdLst>
         </p14:section>
-        <p14:section name="보충" id="{4e053142-8c17-b4e3-49c8-b66807f267ac}">
+        <p14:section name="보충" id="{d19c1563-4bbe-6f95-7d70-58f84865e299}">
           <p14:sldIdLst>
             <p14:sldId id="263"/>
           </p14:sldIdLst>
